--- a/backend/app/assets/template.pptx
+++ b/backend/app/assets/template.pptx
@@ -1,6 +1,6 @@
 
 <file path=ppt/presentation.xml><?xml version="1.0" encoding="utf-8"?>
-<p:presentation xmlns:a="http://schemas.openxmlformats.org/drawingml/2006/main" xmlns:r="http://schemas.openxmlformats.org/officeDocument/2006/relationships" xmlns:p="http://schemas.openxmlformats.org/presentationml/2006/main" embedTrueTypeFonts="1" saveSubsetFonts="1">
+<p:presentation xmlns:a="http://schemas.openxmlformats.org/drawingml/2006/main" xmlns:r="http://schemas.openxmlformats.org/officeDocument/2006/relationships" xmlns:p="http://schemas.openxmlformats.org/presentationml/2006/main">
   <p:sldMasterIdLst>
     <p:sldMasterId id="2147483663" r:id="rId4"/>
   </p:sldMasterIdLst>
@@ -23,17 +23,6 @@
   </p:sldIdLst>
   <p:sldSz cx="12192000" cy="6858000"/>
   <p:notesSz cx="6858000" cy="9144000"/>
-  <p:embeddedFontLst>
-    <p:embeddedFont>
-      <p:font typeface="Tajawal" panose="00000500000000000000" pitchFamily="2" charset="-78"/>
-      <p:regular r:id="rId18"/>
-      <p:bold r:id="rId19"/>
-    </p:embeddedFont>
-    <p:embeddedFont>
-      <p:font typeface="Tajawal Medium" panose="00000600000000000000" pitchFamily="2" charset="-78"/>
-      <p:regular r:id="rId20"/>
-    </p:embeddedFont>
-  </p:embeddedFontLst>
   <p:defaultTextStyle>
     <a:defPPr>
       <a:defRPr lang="en-US"/>
@@ -746,36 +735,6 @@
           </a:fontRef>
         </p:style>
       </p:cxnSp>
-      <p:pic>
-        <p:nvPicPr>
-          <p:cNvPr id="10" name="Picture 9">
-            <a:extLst>
-              <a:ext uri="{FF2B5EF4-FFF2-40B4-BE49-F238E27FC236}">
-                <a16:creationId xmlns:a16="http://schemas.microsoft.com/office/drawing/2014/main" id="{156B09AF-16B5-A5FF-AFEA-5182DD97AC87}"/>
-              </a:ext>
-            </a:extLst>
-          </p:cNvPr>
-          <p:cNvPicPr>
-            <a:picLocks noChangeAspect="1"/>
-          </p:cNvPicPr>
-          <p:nvPr userDrawn="1"/>
-        </p:nvPicPr>
-        <p:blipFill>
-          <a:blip r:embed="rId2"/>
-          <a:stretch>
-            <a:fillRect/>
-          </a:stretch>
-        </p:blipFill>
-        <p:spPr>
-          <a:xfrm>
-            <a:off x="444500" y="6557332"/>
-            <a:ext cx="423292" cy="192943"/>
-          </a:xfrm>
-          <a:prstGeom prst="rect">
-            <a:avLst/>
-          </a:prstGeom>
-        </p:spPr>
-      </p:pic>
       <p:sp>
         <p:nvSpPr>
           <p:cNvPr id="2" name="Title 1">
@@ -1467,36 +1426,6 @@
           </a:fontRef>
         </p:style>
       </p:cxnSp>
-      <p:pic>
-        <p:nvPicPr>
-          <p:cNvPr id="10" name="Picture 9">
-            <a:extLst>
-              <a:ext uri="{FF2B5EF4-FFF2-40B4-BE49-F238E27FC236}">
-                <a16:creationId xmlns:a16="http://schemas.microsoft.com/office/drawing/2014/main" id="{156B09AF-16B5-A5FF-AFEA-5182DD97AC87}"/>
-              </a:ext>
-            </a:extLst>
-          </p:cNvPr>
-          <p:cNvPicPr>
-            <a:picLocks noChangeAspect="1"/>
-          </p:cNvPicPr>
-          <p:nvPr userDrawn="1"/>
-        </p:nvPicPr>
-        <p:blipFill>
-          <a:blip r:embed="rId2"/>
-          <a:stretch>
-            <a:fillRect/>
-          </a:stretch>
-        </p:blipFill>
-        <p:spPr>
-          <a:xfrm>
-            <a:off x="444500" y="6557332"/>
-            <a:ext cx="423292" cy="192943"/>
-          </a:xfrm>
-          <a:prstGeom prst="rect">
-            <a:avLst/>
-          </a:prstGeom>
-        </p:spPr>
-      </p:pic>
       <p:sp>
         <p:nvSpPr>
           <p:cNvPr id="2" name="Title 1">
@@ -1977,36 +1906,6 @@
           </a:p>
         </p:txBody>
       </p:sp>
-      <p:pic>
-        <p:nvPicPr>
-          <p:cNvPr id="14" name="Picture 13">
-            <a:extLst>
-              <a:ext uri="{FF2B5EF4-FFF2-40B4-BE49-F238E27FC236}">
-                <a16:creationId xmlns:a16="http://schemas.microsoft.com/office/drawing/2014/main" id="{887570D7-463E-E030-5863-0F4F698E7352}"/>
-              </a:ext>
-            </a:extLst>
-          </p:cNvPr>
-          <p:cNvPicPr>
-            <a:picLocks noChangeAspect="1"/>
-          </p:cNvPicPr>
-          <p:nvPr userDrawn="1"/>
-        </p:nvPicPr>
-        <p:blipFill>
-          <a:blip r:embed="rId2"/>
-          <a:stretch>
-            <a:fillRect/>
-          </a:stretch>
-        </p:blipFill>
-        <p:spPr>
-          <a:xfrm>
-            <a:off x="444500" y="6557332"/>
-            <a:ext cx="423292" cy="192943"/>
-          </a:xfrm>
-          <a:prstGeom prst="rect">
-            <a:avLst/>
-          </a:prstGeom>
-        </p:spPr>
-      </p:pic>
       <p:sp>
         <p:nvSpPr>
           <p:cNvPr id="15" name="TextBox 14">
@@ -8085,36 +7984,6 @@
           </a:p>
         </p:txBody>
       </p:sp>
-      <p:pic>
-        <p:nvPicPr>
-          <p:cNvPr id="3" name="Picture 2">
-            <a:extLst>
-              <a:ext uri="{FF2B5EF4-FFF2-40B4-BE49-F238E27FC236}">
-                <a16:creationId xmlns:a16="http://schemas.microsoft.com/office/drawing/2014/main" id="{9527E433-2EDB-0980-7022-11269765D603}"/>
-              </a:ext>
-            </a:extLst>
-          </p:cNvPr>
-          <p:cNvPicPr>
-            <a:picLocks noChangeAspect="1"/>
-          </p:cNvPicPr>
-          <p:nvPr/>
-        </p:nvPicPr>
-        <p:blipFill>
-          <a:blip r:embed="rId4"/>
-          <a:stretch>
-            <a:fillRect/>
-          </a:stretch>
-        </p:blipFill>
-        <p:spPr>
-          <a:xfrm>
-            <a:off x="444500" y="6557332"/>
-            <a:ext cx="423292" cy="192943"/>
-          </a:xfrm>
-          <a:prstGeom prst="rect">
-            <a:avLst/>
-          </a:prstGeom>
-        </p:spPr>
-      </p:pic>
       <p:sp>
         <p:nvSpPr>
           <p:cNvPr id="4" name="TextBox 3">

--- a/backend/app/assets/template.pptx
+++ b/backend/app/assets/template.pptx
@@ -1281,61 +1281,6 @@
       </p:grpSpPr>
       <p:sp>
         <p:nvSpPr>
-          <p:cNvPr id="190" name="Rectangle 11">
-            <a:extLst>
-              <a:ext uri="{FF2B5EF4-FFF2-40B4-BE49-F238E27FC236}">
-                <a16:creationId xmlns:a16="http://schemas.microsoft.com/office/drawing/2014/main" id="{AD603F21-F0EA-265C-FB42-7D705BD8054B}"/>
-              </a:ext>
-            </a:extLst>
-          </p:cNvPr>
-          <p:cNvSpPr/>
-          <p:nvPr userDrawn="1"/>
-        </p:nvSpPr>
-        <p:spPr>
-          <a:xfrm>
-            <a:off x="194510" y="139989"/>
-            <a:ext cx="11726779" cy="6251734"/>
-          </a:xfrm>
-          <a:prstGeom prst="rect">
-            <a:avLst/>
-          </a:prstGeom>
-          <a:solidFill>
-            <a:schemeClr val="bg1">
-              <a:lumMod val="85000"/>
-              <a:alpha val="26000"/>
-            </a:schemeClr>
-          </a:solidFill>
-          <a:ln>
-            <a:noFill/>
-          </a:ln>
-        </p:spPr>
-        <p:style>
-          <a:lnRef idx="2">
-            <a:schemeClr val="accent1">
-              <a:shade val="15000"/>
-            </a:schemeClr>
-          </a:lnRef>
-          <a:fillRef idx="1">
-            <a:schemeClr val="accent1"/>
-          </a:fillRef>
-          <a:effectRef idx="0">
-            <a:schemeClr val="accent1"/>
-          </a:effectRef>
-          <a:fontRef idx="minor">
-            <a:schemeClr val="lt1"/>
-          </a:fontRef>
-        </p:style>
-        <p:txBody>
-          <a:bodyPr rtlCol="0" anchor="ctr"/>
-          <a:lstStyle/>
-          <a:p>
-            <a:pPr marL="0" algn="r" defTabSz="914400" rtl="1" eaLnBrk="1" latinLnBrk="0" hangingPunct="1"/>
-            <a:endParaRPr lang="en-SA" dirty="0"/>
-          </a:p>
-        </p:txBody>
-      </p:sp>
-      <p:sp>
-        <p:nvSpPr>
           <p:cNvPr id="4" name="Rectangle 3">
             <a:extLst>
               <a:ext uri="{FF2B5EF4-FFF2-40B4-BE49-F238E27FC236}">
@@ -1383,49 +1328,6 @@
           </a:p>
         </p:txBody>
       </p:sp>
-      <p:cxnSp>
-        <p:nvCxnSpPr>
-          <p:cNvPr id="5" name="Straight Connector 4">
-            <a:extLst>
-              <a:ext uri="{FF2B5EF4-FFF2-40B4-BE49-F238E27FC236}">
-                <a16:creationId xmlns:a16="http://schemas.microsoft.com/office/drawing/2014/main" id="{76204730-2B7D-CFC2-2539-6960BEC6A4CC}"/>
-              </a:ext>
-            </a:extLst>
-          </p:cNvPr>
-          <p:cNvCxnSpPr>
-            <a:cxnSpLocks/>
-          </p:cNvCxnSpPr>
-          <p:nvPr userDrawn="1"/>
-        </p:nvCxnSpPr>
-        <p:spPr>
-          <a:xfrm>
-            <a:off x="954231" y="6508710"/>
-            <a:ext cx="0" cy="319846"/>
-          </a:xfrm>
-          <a:prstGeom prst="line">
-            <a:avLst/>
-          </a:prstGeom>
-          <a:ln>
-            <a:solidFill>
-              <a:srgbClr val="989898"/>
-            </a:solidFill>
-          </a:ln>
-        </p:spPr>
-        <p:style>
-          <a:lnRef idx="2">
-            <a:schemeClr val="accent1"/>
-          </a:lnRef>
-          <a:fillRef idx="0">
-            <a:schemeClr val="accent1"/>
-          </a:fillRef>
-          <a:effectRef idx="1">
-            <a:schemeClr val="accent1"/>
-          </a:effectRef>
-          <a:fontRef idx="minor">
-            <a:schemeClr val="tx1"/>
-          </a:fontRef>
-        </p:style>
-      </p:cxnSp>
       <p:sp>
         <p:nvSpPr>
           <p:cNvPr id="2" name="Title 1">
